--- a/generated/Tier 1 Broker Scorecards/Prestige International Insurance Group Inc Dba Prestige Trucking Insurance Inc_Broker_Scorecard.pptx
+++ b/generated/Tier 1 Broker Scorecards/Prestige International Insurance Group Inc Dba Prestige Trucking Insurance Inc_Broker_Scorecard.pptx
@@ -3394,7 +3394,7 @@
                         <a:rPr sz="900">
                           <a:latin typeface="Segoe UI"/>
                         </a:rPr>
-                        <a:t>Tier 1  |  3.21% / 15.00%</a:t>
+                        <a:t>Tier 1  |  3.19% / 15.00%</a:t>
                       </a:r>
                     </a:p>
                   </a:txBody>
@@ -3690,7 +3690,7 @@
                         <a:rPr sz="900">
                           <a:latin typeface="Segoe UI"/>
                         </a:rPr>
-                        <a:t>Fleet Bound Premium: $756,503.06</a:t>
+                        <a:t>Fleet Bound Premium: $760,396.35</a:t>
                       </a:r>
                     </a:p>
                   </a:txBody>
@@ -3727,7 +3727,7 @@
                         <a:rPr sz="900">
                           <a:latin typeface="Segoe UI"/>
                         </a:rPr>
-                        <a:t>Fleet Book %: 56.8%</a:t>
+                        <a:t>Fleet Book %: 57.1%</a:t>
                       </a:r>
                     </a:p>
                   </a:txBody>
@@ -3766,7 +3766,7 @@
                         <a:rPr sz="900">
                           <a:latin typeface="Segoe UI"/>
                         </a:rPr>
-                        <a:t>Non-Fleet Subs: 1279  |  Binds: 34</a:t>
+                        <a:t>Non-Fleet Subs: 1288  |  Binds: 34</a:t>
                       </a:r>
                     </a:p>
                   </a:txBody>
@@ -3803,7 +3803,7 @@
                         <a:rPr sz="900">
                           <a:latin typeface="Segoe UI"/>
                         </a:rPr>
-                        <a:t>Non-Fleet Bound Premium: $575,623.67</a:t>
+                        <a:t>Non-Fleet Bound Premium: $571,730.38</a:t>
                       </a:r>
                     </a:p>
                   </a:txBody>
@@ -3840,7 +3840,7 @@
                         <a:rPr sz="900">
                           <a:latin typeface="Segoe UI"/>
                         </a:rPr>
-                        <a:t>Non-Fleet Book %: 43.2%</a:t>
+                        <a:t>Non-Fleet Book %: 42.9%</a:t>
                       </a:r>
                     </a:p>
                   </a:txBody>
@@ -4428,7 +4428,7 @@
                           </a:solidFill>
                           <a:latin typeface="Segoe UI"/>
                         </a:rPr>
-                        <a:t>158</a:t>
+                        <a:t>167</a:t>
                       </a:r>
                     </a:p>
                   </a:txBody>
@@ -4581,7 +4581,7 @@
                         <a:rPr sz="800">
                           <a:latin typeface="Segoe UI"/>
                         </a:rPr>
-                        <a:t>15.0%</a:t>
+                        <a:t>15.5%</a:t>
                       </a:r>
                     </a:p>
                   </a:txBody>
@@ -4707,7 +4707,7 @@
                           </a:solidFill>
                           <a:latin typeface="Segoe UI"/>
                         </a:rPr>
-                        <a:t>4.4%</a:t>
+                        <a:t>4.2%</a:t>
                       </a:r>
                     </a:p>
                   </a:txBody>
@@ -4747,7 +4747,7 @@
                         <a:rPr sz="800">
                           <a:latin typeface="Segoe UI"/>
                         </a:rPr>
-                        <a:t>9.1%</a:t>
+                        <a:t>9.5%</a:t>
                       </a:r>
                     </a:p>
                   </a:txBody>
@@ -4866,7 +4866,7 @@
                         <a:rPr sz="800">
                           <a:latin typeface="Segoe UI"/>
                         </a:rPr>
-                        <a:t>31</a:t>
+                        <a:t>32</a:t>
                       </a:r>
                     </a:p>
                   </a:txBody>
@@ -5020,7 +5020,7 @@
                         <a:rPr sz="800">
                           <a:latin typeface="Segoe UI"/>
                         </a:rPr>
-                        <a:t>27</a:t>
+                        <a:t>28</a:t>
                       </a:r>
                     </a:p>
                   </a:txBody>

--- a/generated/Tier 1 Broker Scorecards/Prestige International Insurance Group Inc Dba Prestige Trucking Insurance Inc_Broker_Scorecard.pptx
+++ b/generated/Tier 1 Broker Scorecards/Prestige International Insurance Group Inc Dba Prestige Trucking Insurance Inc_Broker_Scorecard.pptx
@@ -3394,7 +3394,7 @@
                         <a:rPr sz="900">
                           <a:latin typeface="Segoe UI"/>
                         </a:rPr>
-                        <a:t>Tier 1  |  3.19% / 15.00%</a:t>
+                        <a:t>Tier 1  |  3.23% / 15.00%</a:t>
                       </a:r>
                     </a:p>
                   </a:txBody>
@@ -3653,7 +3653,7 @@
                         <a:rPr sz="900">
                           <a:latin typeface="Segoe UI"/>
                         </a:rPr>
-                        <a:t>Fleet Subs: 92  |  Binds: 10</a:t>
+                        <a:t>Fleet Subs: 93  |  Binds: 10</a:t>
                       </a:r>
                     </a:p>
                   </a:txBody>
@@ -3690,7 +3690,7 @@
                         <a:rPr sz="900">
                           <a:latin typeface="Segoe UI"/>
                         </a:rPr>
-                        <a:t>Fleet Bound Premium: $760,396.35</a:t>
+                        <a:t>Fleet Bound Premium: $727,676.49</a:t>
                       </a:r>
                     </a:p>
                   </a:txBody>
@@ -3727,7 +3727,7 @@
                         <a:rPr sz="900">
                           <a:latin typeface="Segoe UI"/>
                         </a:rPr>
-                        <a:t>Fleet Book %: 57.1%</a:t>
+                        <a:t>Fleet Book %: 54.6%</a:t>
                       </a:r>
                     </a:p>
                   </a:txBody>
@@ -3766,7 +3766,7 @@
                         <a:rPr sz="900">
                           <a:latin typeface="Segoe UI"/>
                         </a:rPr>
-                        <a:t>Non-Fleet Subs: 1288  |  Binds: 34</a:t>
+                        <a:t>Non-Fleet Subs: 1300  |  Binds: 35</a:t>
                       </a:r>
                     </a:p>
                   </a:txBody>
@@ -3803,7 +3803,7 @@
                         <a:rPr sz="900">
                           <a:latin typeface="Segoe UI"/>
                         </a:rPr>
-                        <a:t>Non-Fleet Bound Premium: $571,730.38</a:t>
+                        <a:t>Non-Fleet Bound Premium: $604,450.24</a:t>
                       </a:r>
                     </a:p>
                   </a:txBody>
@@ -3840,7 +3840,7 @@
                         <a:rPr sz="900">
                           <a:latin typeface="Segoe UI"/>
                         </a:rPr>
-                        <a:t>Non-Fleet Book %: 42.9%</a:t>
+                        <a:t>Non-Fleet Book %: 45.4%</a:t>
                       </a:r>
                     </a:p>
                   </a:txBody>
@@ -4428,7 +4428,7 @@
                           </a:solidFill>
                           <a:latin typeface="Segoe UI"/>
                         </a:rPr>
-                        <a:t>167</a:t>
+                        <a:t>181</a:t>
                       </a:r>
                     </a:p>
                   </a:txBody>
@@ -4581,7 +4581,7 @@
                         <a:rPr sz="800">
                           <a:latin typeface="Segoe UI"/>
                         </a:rPr>
-                        <a:t>15.5%</a:t>
+                        <a:t>15.0%</a:t>
                       </a:r>
                     </a:p>
                   </a:txBody>
@@ -4664,7 +4664,7 @@
                         <a:rPr sz="800">
                           <a:latin typeface="Segoe UI"/>
                         </a:rPr>
-                        <a:t>15.1%</a:t>
+                        <a:t>14.6%</a:t>
                       </a:r>
                     </a:p>
                   </a:txBody>
@@ -4707,7 +4707,7 @@
                           </a:solidFill>
                           <a:latin typeface="Segoe UI"/>
                         </a:rPr>
-                        <a:t>4.2%</a:t>
+                        <a:t>3.9%</a:t>
                       </a:r>
                     </a:p>
                   </a:txBody>
@@ -4866,7 +4866,7 @@
                         <a:rPr sz="800">
                           <a:latin typeface="Segoe UI"/>
                         </a:rPr>
-                        <a:t>32</a:t>
+                        <a:t>31</a:t>
                       </a:r>
                     </a:p>
                   </a:txBody>
@@ -4943,7 +4943,7 @@
                         <a:rPr sz="800">
                           <a:latin typeface="Segoe UI"/>
                         </a:rPr>
-                        <a:t>31</a:t>
+                        <a:t>30</a:t>
                       </a:r>
                     </a:p>
                   </a:txBody>

--- a/generated/Tier 1 Broker Scorecards/Prestige International Insurance Group Inc Dba Prestige Trucking Insurance Inc_Broker_Scorecard.pptx
+++ b/generated/Tier 1 Broker Scorecards/Prestige International Insurance Group Inc Dba Prestige Trucking Insurance Inc_Broker_Scorecard.pptx
@@ -3357,7 +3357,7 @@
                         <a:rPr sz="800">
                           <a:latin typeface="Segoe UI"/>
                         </a:rPr>
-                        <a:t>$5,400,436.83 / $4,897,728.64 / $1,332,126.73</a:t>
+                        <a:t>$5,400,436.83 / $4,918,638.53 / $1,353,036.62</a:t>
                       </a:r>
                     </a:p>
                   </a:txBody>
@@ -3394,7 +3394,7 @@
                         <a:rPr sz="900">
                           <a:latin typeface="Segoe UI"/>
                         </a:rPr>
-                        <a:t>Tier 1  |  3.23% / 15.00%</a:t>
+                        <a:t>Tier 1  |  3.20% / 15.00%</a:t>
                       </a:r>
                     </a:p>
                   </a:txBody>
@@ -3431,7 +3431,7 @@
                         <a:rPr sz="900">
                           <a:latin typeface="Segoe UI"/>
                         </a:rPr>
-                        <a:t>$7,560,611.56  (17.6% achieved)</a:t>
+                        <a:t>$7,560,611.56  (17.9% achieved)</a:t>
                       </a:r>
                     </a:p>
                   </a:txBody>
@@ -3653,7 +3653,7 @@
                         <a:rPr sz="900">
                           <a:latin typeface="Segoe UI"/>
                         </a:rPr>
-                        <a:t>Fleet Subs: 93  |  Binds: 10</a:t>
+                        <a:t>Fleet Subs: 93  |  Binds: 9</a:t>
                       </a:r>
                     </a:p>
                   </a:txBody>
@@ -3690,7 +3690,7 @@
                         <a:rPr sz="900">
                           <a:latin typeface="Segoe UI"/>
                         </a:rPr>
-                        <a:t>Fleet Bound Premium: $727,676.49</a:t>
+                        <a:t>Fleet Bound Premium: $724,140.31</a:t>
                       </a:r>
                     </a:p>
                   </a:txBody>
@@ -3727,7 +3727,7 @@
                         <a:rPr sz="900">
                           <a:latin typeface="Segoe UI"/>
                         </a:rPr>
-                        <a:t>Fleet Book %: 54.6%</a:t>
+                        <a:t>Fleet Book %: 53.5%</a:t>
                       </a:r>
                     </a:p>
                   </a:txBody>
@@ -3766,7 +3766,7 @@
                         <a:rPr sz="900">
                           <a:latin typeface="Segoe UI"/>
                         </a:rPr>
-                        <a:t>Non-Fleet Subs: 1300  |  Binds: 35</a:t>
+                        <a:t>Non-Fleet Subs: 1312  |  Binds: 36</a:t>
                       </a:r>
                     </a:p>
                   </a:txBody>
@@ -3803,7 +3803,7 @@
                         <a:rPr sz="900">
                           <a:latin typeface="Segoe UI"/>
                         </a:rPr>
-                        <a:t>Non-Fleet Bound Premium: $604,450.24</a:t>
+                        <a:t>Non-Fleet Bound Premium: $628,896.31</a:t>
                       </a:r>
                     </a:p>
                   </a:txBody>
@@ -3840,7 +3840,7 @@
                         <a:rPr sz="900">
                           <a:latin typeface="Segoe UI"/>
                         </a:rPr>
-                        <a:t>Non-Fleet Book %: 45.4%</a:t>
+                        <a:t>Non-Fleet Book %: 46.5%</a:t>
                       </a:r>
                     </a:p>
                   </a:txBody>
@@ -4428,7 +4428,7 @@
                           </a:solidFill>
                           <a:latin typeface="Segoe UI"/>
                         </a:rPr>
-                        <a:t>181</a:t>
+                        <a:t>195</a:t>
                       </a:r>
                     </a:p>
                   </a:txBody>
@@ -4581,7 +4581,7 @@
                         <a:rPr sz="800">
                           <a:latin typeface="Segoe UI"/>
                         </a:rPr>
-                        <a:t>15.0%</a:t>
+                        <a:t>15.5%</a:t>
                       </a:r>
                     </a:p>
                   </a:txBody>
@@ -4664,7 +4664,7 @@
                         <a:rPr sz="800">
                           <a:latin typeface="Segoe UI"/>
                         </a:rPr>
-                        <a:t>14.6%</a:t>
+                        <a:t>15.1%</a:t>
                       </a:r>
                     </a:p>
                   </a:txBody>
@@ -4707,7 +4707,7 @@
                           </a:solidFill>
                           <a:latin typeface="Segoe UI"/>
                         </a:rPr>
-                        <a:t>3.9%</a:t>
+                        <a:t>4.1%</a:t>
                       </a:r>
                     </a:p>
                   </a:txBody>
@@ -4866,7 +4866,7 @@
                         <a:rPr sz="800">
                           <a:latin typeface="Segoe UI"/>
                         </a:rPr>
-                        <a:t>31</a:t>
+                        <a:t>32</a:t>
                       </a:r>
                     </a:p>
                   </a:txBody>
@@ -4943,7 +4943,7 @@
                         <a:rPr sz="800">
                           <a:latin typeface="Segoe UI"/>
                         </a:rPr>
-                        <a:t>30</a:t>
+                        <a:t>31</a:t>
                       </a:r>
                     </a:p>
                   </a:txBody>
@@ -4983,7 +4983,7 @@
                           </a:solidFill>
                           <a:latin typeface="Segoe UI"/>
                         </a:rPr>
-                        <a:t>7</a:t>
+                        <a:t>8</a:t>
                       </a:r>
                     </a:p>
                   </a:txBody>
@@ -5262,7 +5262,7 @@
                           </a:solidFill>
                           <a:latin typeface="Segoe UI"/>
                         </a:rPr>
-                        <a:t>$111.3K</a:t>
+                        <a:t>$132.2K</a:t>
                       </a:r>
                     </a:p>
                   </a:txBody>

--- a/generated/Tier 1 Broker Scorecards/Prestige International Insurance Group Inc Dba Prestige Trucking Insurance Inc_Broker_Scorecard.pptx
+++ b/generated/Tier 1 Broker Scorecards/Prestige International Insurance Group Inc Dba Prestige Trucking Insurance Inc_Broker_Scorecard.pptx
@@ -3357,7 +3357,7 @@
                         <a:rPr sz="800">
                           <a:latin typeface="Segoe UI"/>
                         </a:rPr>
-                        <a:t>$5,400,436.83 / $4,918,638.53 / $1,353,036.62</a:t>
+                        <a:t>$5,400,436.83 / $4,949,338.21 / $1,383,736.30</a:t>
                       </a:r>
                     </a:p>
                   </a:txBody>
@@ -3394,7 +3394,7 @@
                         <a:rPr sz="900">
                           <a:latin typeface="Segoe UI"/>
                         </a:rPr>
-                        <a:t>Tier 1  |  3.20% / 15.00%</a:t>
+                        <a:t>Tier 1  |  3.31% / 15.00%</a:t>
                       </a:r>
                     </a:p>
                   </a:txBody>
@@ -3431,7 +3431,7 @@
                         <a:rPr sz="900">
                           <a:latin typeface="Segoe UI"/>
                         </a:rPr>
-                        <a:t>$7,560,611.56  (17.9% achieved)</a:t>
+                        <a:t>$7,560,611.56  (18.3% achieved)</a:t>
                       </a:r>
                     </a:p>
                   </a:txBody>
@@ -3690,7 +3690,7 @@
                         <a:rPr sz="900">
                           <a:latin typeface="Segoe UI"/>
                         </a:rPr>
-                        <a:t>Fleet Bound Premium: $724,140.31</a:t>
+                        <a:t>Fleet Bound Premium: $701,071.31</a:t>
                       </a:r>
                     </a:p>
                   </a:txBody>
@@ -3727,7 +3727,7 @@
                         <a:rPr sz="900">
                           <a:latin typeface="Segoe UI"/>
                         </a:rPr>
-                        <a:t>Fleet Book %: 53.5%</a:t>
+                        <a:t>Fleet Book %: 50.7%</a:t>
                       </a:r>
                     </a:p>
                   </a:txBody>
@@ -3766,7 +3766,7 @@
                         <a:rPr sz="900">
                           <a:latin typeface="Segoe UI"/>
                         </a:rPr>
-                        <a:t>Non-Fleet Subs: 1312  |  Binds: 36</a:t>
+                        <a:t>Non-Fleet Subs: 1326  |  Binds: 38</a:t>
                       </a:r>
                     </a:p>
                   </a:txBody>
@@ -3803,7 +3803,7 @@
                         <a:rPr sz="900">
                           <a:latin typeface="Segoe UI"/>
                         </a:rPr>
-                        <a:t>Non-Fleet Bound Premium: $628,896.31</a:t>
+                        <a:t>Non-Fleet Bound Premium: $682,664.99</a:t>
                       </a:r>
                     </a:p>
                   </a:txBody>
@@ -3840,7 +3840,7 @@
                         <a:rPr sz="900">
                           <a:latin typeface="Segoe UI"/>
                         </a:rPr>
-                        <a:t>Non-Fleet Book %: 46.5%</a:t>
+                        <a:t>Non-Fleet Book %: 49.3%</a:t>
                       </a:r>
                     </a:p>
                   </a:txBody>
@@ -4424,11 +4424,11 @@
                       <a:r>
                         <a:rPr sz="800">
                           <a:solidFill>
-                            <a:srgbClr val="DC2626"/>
+                            <a:srgbClr val="059669"/>
                           </a:solidFill>
                           <a:latin typeface="Segoe UI"/>
                         </a:rPr>
-                        <a:t>195</a:t>
+                        <a:t>212</a:t>
                       </a:r>
                     </a:p>
                   </a:txBody>
@@ -4581,7 +4581,7 @@
                         <a:rPr sz="800">
                           <a:latin typeface="Segoe UI"/>
                         </a:rPr>
-                        <a:t>15.5%</a:t>
+                        <a:t>15.0%</a:t>
                       </a:r>
                     </a:p>
                   </a:txBody>
@@ -4664,7 +4664,7 @@
                         <a:rPr sz="800">
                           <a:latin typeface="Segoe UI"/>
                         </a:rPr>
-                        <a:t>15.1%</a:t>
+                        <a:t>14.6%</a:t>
                       </a:r>
                     </a:p>
                   </a:txBody>
@@ -4707,7 +4707,7 @@
                           </a:solidFill>
                           <a:latin typeface="Segoe UI"/>
                         </a:rPr>
-                        <a:t>4.1%</a:t>
+                        <a:t>4.7%</a:t>
                       </a:r>
                     </a:p>
                   </a:txBody>
@@ -4747,7 +4747,7 @@
                         <a:rPr sz="800">
                           <a:latin typeface="Segoe UI"/>
                         </a:rPr>
-                        <a:t>9.5%</a:t>
+                        <a:t>8.8%</a:t>
                       </a:r>
                     </a:p>
                   </a:txBody>
@@ -4866,7 +4866,7 @@
                         <a:rPr sz="800">
                           <a:latin typeface="Segoe UI"/>
                         </a:rPr>
-                        <a:t>32</a:t>
+                        <a:t>31</a:t>
                       </a:r>
                     </a:p>
                   </a:txBody>
@@ -4943,7 +4943,7 @@
                         <a:rPr sz="800">
                           <a:latin typeface="Segoe UI"/>
                         </a:rPr>
-                        <a:t>31</a:t>
+                        <a:t>30</a:t>
                       </a:r>
                     </a:p>
                   </a:txBody>
@@ -4983,7 +4983,7 @@
                           </a:solidFill>
                           <a:latin typeface="Segoe UI"/>
                         </a:rPr>
-                        <a:t>8</a:t>
+                        <a:t>10</a:t>
                       </a:r>
                     </a:p>
                   </a:txBody>
@@ -5020,7 +5020,7 @@
                         <a:rPr sz="800">
                           <a:latin typeface="Segoe UI"/>
                         </a:rPr>
-                        <a:t>28</a:t>
+                        <a:t>26</a:t>
                       </a:r>
                     </a:p>
                   </a:txBody>
@@ -5262,7 +5262,7 @@
                           </a:solidFill>
                           <a:latin typeface="Segoe UI"/>
                         </a:rPr>
-                        <a:t>$132.2K</a:t>
+                        <a:t>$162.9K</a:t>
                       </a:r>
                     </a:p>
                   </a:txBody>

--- a/generated/Tier 1 Broker Scorecards/Prestige International Insurance Group Inc Dba Prestige Trucking Insurance Inc_Broker_Scorecard.pptx
+++ b/generated/Tier 1 Broker Scorecards/Prestige International Insurance Group Inc Dba Prestige Trucking Insurance Inc_Broker_Scorecard.pptx
@@ -3357,7 +3357,7 @@
                         <a:rPr sz="800">
                           <a:latin typeface="Segoe UI"/>
                         </a:rPr>
-                        <a:t>$5,400,436.83 / $4,949,338.21 / $1,383,736.30</a:t>
+                        <a:t>$5,400,436.83 / $4,953,257.66 / $1,387,655.75</a:t>
                       </a:r>
                     </a:p>
                   </a:txBody>
@@ -3394,7 +3394,7 @@
                         <a:rPr sz="900">
                           <a:latin typeface="Segoe UI"/>
                         </a:rPr>
-                        <a:t>Tier 1  |  3.31% / 15.00%</a:t>
+                        <a:t>Tier 1  |  3.28% / 15.00%</a:t>
                       </a:r>
                     </a:p>
                   </a:txBody>
@@ -3431,7 +3431,7 @@
                         <a:rPr sz="900">
                           <a:latin typeface="Segoe UI"/>
                         </a:rPr>
-                        <a:t>$7,560,611.56  (18.3% achieved)</a:t>
+                        <a:t>$7,560,611.56  (18.4% achieved)</a:t>
                       </a:r>
                     </a:p>
                   </a:txBody>
@@ -3653,7 +3653,7 @@
                         <a:rPr sz="900">
                           <a:latin typeface="Segoe UI"/>
                         </a:rPr>
-                        <a:t>Fleet Subs: 93  |  Binds: 9</a:t>
+                        <a:t>Fleet Subs: 93  |  Binds: 10</a:t>
                       </a:r>
                     </a:p>
                   </a:txBody>
@@ -3690,7 +3690,7 @@
                         <a:rPr sz="900">
                           <a:latin typeface="Segoe UI"/>
                         </a:rPr>
-                        <a:t>Fleet Bound Premium: $701,071.31</a:t>
+                        <a:t>Fleet Bound Premium: $759,739.52</a:t>
                       </a:r>
                     </a:p>
                   </a:txBody>
@@ -3727,7 +3727,7 @@
                         <a:rPr sz="900">
                           <a:latin typeface="Segoe UI"/>
                         </a:rPr>
-                        <a:t>Fleet Book %: 50.7%</a:t>
+                        <a:t>Fleet Book %: 54.7%</a:t>
                       </a:r>
                     </a:p>
                   </a:txBody>
@@ -3766,7 +3766,7 @@
                         <a:rPr sz="900">
                           <a:latin typeface="Segoe UI"/>
                         </a:rPr>
-                        <a:t>Non-Fleet Subs: 1326  |  Binds: 38</a:t>
+                        <a:t>Non-Fleet Subs: 1339  |  Binds: 37</a:t>
                       </a:r>
                     </a:p>
                   </a:txBody>
@@ -3803,7 +3803,7 @@
                         <a:rPr sz="900">
                           <a:latin typeface="Segoe UI"/>
                         </a:rPr>
-                        <a:t>Non-Fleet Bound Premium: $682,664.99</a:t>
+                        <a:t>Non-Fleet Bound Premium: $627,916.23</a:t>
                       </a:r>
                     </a:p>
                   </a:txBody>
@@ -3840,7 +3840,7 @@
                         <a:rPr sz="900">
                           <a:latin typeface="Segoe UI"/>
                         </a:rPr>
-                        <a:t>Non-Fleet Book %: 49.3%</a:t>
+                        <a:t>Non-Fleet Book %: 45.3%</a:t>
                       </a:r>
                     </a:p>
                   </a:txBody>
@@ -4428,7 +4428,7 @@
                           </a:solidFill>
                           <a:latin typeface="Segoe UI"/>
                         </a:rPr>
-                        <a:t>212</a:t>
+                        <a:t>225</a:t>
                       </a:r>
                     </a:p>
                   </a:txBody>
@@ -4707,7 +4707,7 @@
                           </a:solidFill>
                           <a:latin typeface="Segoe UI"/>
                         </a:rPr>
-                        <a:t>4.7%</a:t>
+                        <a:t>4.9%</a:t>
                       </a:r>
                     </a:p>
                   </a:txBody>
@@ -4747,7 +4747,7 @@
                         <a:rPr sz="800">
                           <a:latin typeface="Segoe UI"/>
                         </a:rPr>
-                        <a:t>8.8%</a:t>
+                        <a:t>9.1%</a:t>
                       </a:r>
                     </a:p>
                   </a:txBody>
@@ -4983,7 +4983,7 @@
                           </a:solidFill>
                           <a:latin typeface="Segoe UI"/>
                         </a:rPr>
-                        <a:t>10</a:t>
+                        <a:t>11</a:t>
                       </a:r>
                     </a:p>
                   </a:txBody>
@@ -5020,7 +5020,7 @@
                         <a:rPr sz="800">
                           <a:latin typeface="Segoe UI"/>
                         </a:rPr>
-                        <a:t>26</a:t>
+                        <a:t>27</a:t>
                       </a:r>
                     </a:p>
                   </a:txBody>
@@ -5262,7 +5262,7 @@
                           </a:solidFill>
                           <a:latin typeface="Segoe UI"/>
                         </a:rPr>
-                        <a:t>$162.9K</a:t>
+                        <a:t>$166.9K</a:t>
                       </a:r>
                     </a:p>
                   </a:txBody>

--- a/generated/Tier 1 Broker Scorecards/Prestige International Insurance Group Inc Dba Prestige Trucking Insurance Inc_Broker_Scorecard.pptx
+++ b/generated/Tier 1 Broker Scorecards/Prestige International Insurance Group Inc Dba Prestige Trucking Insurance Inc_Broker_Scorecard.pptx
@@ -3394,7 +3394,7 @@
                         <a:rPr sz="900">
                           <a:latin typeface="Segoe UI"/>
                         </a:rPr>
-                        <a:t>Tier 1  |  3.28% / 15.00%</a:t>
+                        <a:t>Tier 1  |  3.35% / 15.00%</a:t>
                       </a:r>
                     </a:p>
                   </a:txBody>
@@ -3690,7 +3690,7 @@
                         <a:rPr sz="900">
                           <a:latin typeface="Segoe UI"/>
                         </a:rPr>
-                        <a:t>Fleet Bound Premium: $759,739.52</a:t>
+                        <a:t>Fleet Bound Premium: $744,198.29</a:t>
                       </a:r>
                     </a:p>
                   </a:txBody>
@@ -3727,7 +3727,7 @@
                         <a:rPr sz="900">
                           <a:latin typeface="Segoe UI"/>
                         </a:rPr>
-                        <a:t>Fleet Book %: 54.7%</a:t>
+                        <a:t>Fleet Book %: 53.6%</a:t>
                       </a:r>
                     </a:p>
                   </a:txBody>
@@ -3766,7 +3766,7 @@
                         <a:rPr sz="900">
                           <a:latin typeface="Segoe UI"/>
                         </a:rPr>
-                        <a:t>Non-Fleet Subs: 1339  |  Binds: 37</a:t>
+                        <a:t>Non-Fleet Subs: 1339  |  Binds: 38</a:t>
                       </a:r>
                     </a:p>
                   </a:txBody>
@@ -3803,7 +3803,7 @@
                         <a:rPr sz="900">
                           <a:latin typeface="Segoe UI"/>
                         </a:rPr>
-                        <a:t>Non-Fleet Bound Premium: $627,916.23</a:t>
+                        <a:t>Non-Fleet Bound Premium: $643,457.46</a:t>
                       </a:r>
                     </a:p>
                   </a:txBody>
@@ -3840,7 +3840,7 @@
                         <a:rPr sz="900">
                           <a:latin typeface="Segoe UI"/>
                         </a:rPr>
-                        <a:t>Non-Fleet Book %: 45.3%</a:t>
+                        <a:t>Non-Fleet Book %: 46.4%</a:t>
                       </a:r>
                     </a:p>
                   </a:txBody>
@@ -4747,7 +4747,7 @@
                         <a:rPr sz="800">
                           <a:latin typeface="Segoe UI"/>
                         </a:rPr>
-                        <a:t>9.1%</a:t>
+                        <a:t>8.8%</a:t>
                       </a:r>
                     </a:p>
                   </a:txBody>
@@ -5020,7 +5020,7 @@
                         <a:rPr sz="800">
                           <a:latin typeface="Segoe UI"/>
                         </a:rPr>
-                        <a:t>27</a:t>
+                        <a:t>26</a:t>
                       </a:r>
                     </a:p>
                   </a:txBody>

--- a/generated/Tier 1 Broker Scorecards/Prestige International Insurance Group Inc Dba Prestige Trucking Insurance Inc_Broker_Scorecard.pptx
+++ b/generated/Tier 1 Broker Scorecards/Prestige International Insurance Group Inc Dba Prestige Trucking Insurance Inc_Broker_Scorecard.pptx
@@ -3653,7 +3653,7 @@
                         <a:rPr sz="900">
                           <a:latin typeface="Segoe UI"/>
                         </a:rPr>
-                        <a:t>Fleet Subs: 93  |  Binds: 10</a:t>
+                        <a:t>Fleet Subs: 94  |  Binds: 10</a:t>
                       </a:r>
                     </a:p>
                   </a:txBody>
@@ -3690,7 +3690,7 @@
                         <a:rPr sz="900">
                           <a:latin typeface="Segoe UI"/>
                         </a:rPr>
-                        <a:t>Fleet Bound Premium: $744,198.29</a:t>
+                        <a:t>Fleet Bound Premium: $748,263.96</a:t>
                       </a:r>
                     </a:p>
                   </a:txBody>
@@ -3727,7 +3727,7 @@
                         <a:rPr sz="900">
                           <a:latin typeface="Segoe UI"/>
                         </a:rPr>
-                        <a:t>Fleet Book %: 53.6%</a:t>
+                        <a:t>Fleet Book %: 53.9%</a:t>
                       </a:r>
                     </a:p>
                   </a:txBody>
@@ -3803,7 +3803,7 @@
                         <a:rPr sz="900">
                           <a:latin typeface="Segoe UI"/>
                         </a:rPr>
-                        <a:t>Non-Fleet Bound Premium: $643,457.46</a:t>
+                        <a:t>Non-Fleet Bound Premium: $639,391.79</a:t>
                       </a:r>
                     </a:p>
                   </a:txBody>
@@ -3840,7 +3840,7 @@
                         <a:rPr sz="900">
                           <a:latin typeface="Segoe UI"/>
                         </a:rPr>
-                        <a:t>Non-Fleet Book %: 46.4%</a:t>
+                        <a:t>Non-Fleet Book %: 46.1%</a:t>
                       </a:r>
                     </a:p>
                   </a:txBody>
@@ -4428,7 +4428,7 @@
                           </a:solidFill>
                           <a:latin typeface="Segoe UI"/>
                         </a:rPr>
-                        <a:t>225</a:t>
+                        <a:t>226</a:t>
                       </a:r>
                     </a:p>
                   </a:txBody>
@@ -4747,7 +4747,7 @@
                         <a:rPr sz="800">
                           <a:latin typeface="Segoe UI"/>
                         </a:rPr>
-                        <a:t>8.8%</a:t>
+                        <a:t>9.5%</a:t>
                       </a:r>
                     </a:p>
                   </a:txBody>
@@ -5020,7 +5020,7 @@
                         <a:rPr sz="800">
                           <a:latin typeface="Segoe UI"/>
                         </a:rPr>
-                        <a:t>26</a:t>
+                        <a:t>28</a:t>
                       </a:r>
                     </a:p>
                   </a:txBody>

--- a/generated/Tier 1 Broker Scorecards/Prestige International Insurance Group Inc Dba Prestige Trucking Insurance Inc_Broker_Scorecard.pptx
+++ b/generated/Tier 1 Broker Scorecards/Prestige International Insurance Group Inc Dba Prestige Trucking Insurance Inc_Broker_Scorecard.pptx
@@ -3653,7 +3653,7 @@
                         <a:rPr sz="900">
                           <a:latin typeface="Segoe UI"/>
                         </a:rPr>
-                        <a:t>Fleet Subs: 94  |  Binds: 10</a:t>
+                        <a:t>Fleet Subs: 94  |  Binds: 9</a:t>
                       </a:r>
                     </a:p>
                   </a:txBody>
@@ -3690,7 +3690,7 @@
                         <a:rPr sz="900">
                           <a:latin typeface="Segoe UI"/>
                         </a:rPr>
-                        <a:t>Fleet Bound Premium: $748,263.96</a:t>
+                        <a:t>Fleet Bound Premium: $714,504.37</a:t>
                       </a:r>
                     </a:p>
                   </a:txBody>
@@ -3727,7 +3727,7 @@
                         <a:rPr sz="900">
                           <a:latin typeface="Segoe UI"/>
                         </a:rPr>
-                        <a:t>Fleet Book %: 53.9%</a:t>
+                        <a:t>Fleet Book %: 51.5%</a:t>
                       </a:r>
                     </a:p>
                   </a:txBody>
@@ -3766,7 +3766,7 @@
                         <a:rPr sz="900">
                           <a:latin typeface="Segoe UI"/>
                         </a:rPr>
-                        <a:t>Non-Fleet Subs: 1339  |  Binds: 38</a:t>
+                        <a:t>Non-Fleet Subs: 1340  |  Binds: 39</a:t>
                       </a:r>
                     </a:p>
                   </a:txBody>
@@ -3803,7 +3803,7 @@
                         <a:rPr sz="900">
                           <a:latin typeface="Segoe UI"/>
                         </a:rPr>
-                        <a:t>Non-Fleet Bound Premium: $639,391.79</a:t>
+                        <a:t>Non-Fleet Bound Premium: $673,151.38</a:t>
                       </a:r>
                     </a:p>
                   </a:txBody>
@@ -3840,7 +3840,7 @@
                         <a:rPr sz="900">
                           <a:latin typeface="Segoe UI"/>
                         </a:rPr>
-                        <a:t>Non-Fleet Book %: 46.1%</a:t>
+                        <a:t>Non-Fleet Book %: 48.5%</a:t>
                       </a:r>
                     </a:p>
                   </a:txBody>
@@ -4428,7 +4428,7 @@
                           </a:solidFill>
                           <a:latin typeface="Segoe UI"/>
                         </a:rPr>
-                        <a:t>226</a:t>
+                        <a:t>227</a:t>
                       </a:r>
                     </a:p>
                   </a:txBody>
@@ -4581,7 +4581,7 @@
                         <a:rPr sz="800">
                           <a:latin typeface="Segoe UI"/>
                         </a:rPr>
-                        <a:t>15.0%</a:t>
+                        <a:t>15.5%</a:t>
                       </a:r>
                     </a:p>
                   </a:txBody>
@@ -4707,7 +4707,7 @@
                           </a:solidFill>
                           <a:latin typeface="Segoe UI"/>
                         </a:rPr>
-                        <a:t>4.9%</a:t>
+                        <a:t>5.3%</a:t>
                       </a:r>
                     </a:p>
                   </a:txBody>
@@ -4747,7 +4747,7 @@
                         <a:rPr sz="800">
                           <a:latin typeface="Segoe UI"/>
                         </a:rPr>
-                        <a:t>9.5%</a:t>
+                        <a:t>8.8%</a:t>
                       </a:r>
                     </a:p>
                   </a:txBody>
@@ -4866,7 +4866,7 @@
                         <a:rPr sz="800">
                           <a:latin typeface="Segoe UI"/>
                         </a:rPr>
-                        <a:t>31</a:t>
+                        <a:t>32</a:t>
                       </a:r>
                     </a:p>
                   </a:txBody>
@@ -4983,7 +4983,7 @@
                           </a:solidFill>
                           <a:latin typeface="Segoe UI"/>
                         </a:rPr>
-                        <a:t>11</a:t>
+                        <a:t>12</a:t>
                       </a:r>
                     </a:p>
                   </a:txBody>
@@ -5020,7 +5020,7 @@
                         <a:rPr sz="800">
                           <a:latin typeface="Segoe UI"/>
                         </a:rPr>
-                        <a:t>28</a:t>
+                        <a:t>26</a:t>
                       </a:r>
                     </a:p>
                   </a:txBody>

--- a/generated/Tier 1 Broker Scorecards/Prestige International Insurance Group Inc Dba Prestige Trucking Insurance Inc_Broker_Scorecard.pptx
+++ b/generated/Tier 1 Broker Scorecards/Prestige International Insurance Group Inc Dba Prestige Trucking Insurance Inc_Broker_Scorecard.pptx
@@ -3357,7 +3357,7 @@
                         <a:rPr sz="800">
                           <a:latin typeface="Segoe UI"/>
                         </a:rPr>
-                        <a:t>$5,400,436.83 / $4,953,257.66 / $1,387,655.75</a:t>
+                        <a:t>$5,400,436.83 / $4,985,091.08 / $1,419,489.17</a:t>
                       </a:r>
                     </a:p>
                   </a:txBody>
@@ -3394,7 +3394,7 @@
                         <a:rPr sz="900">
                           <a:latin typeface="Segoe UI"/>
                         </a:rPr>
-                        <a:t>Tier 1  |  3.35% / 15.00%</a:t>
+                        <a:t>Tier 1  |  3.39% / 15.00%</a:t>
                       </a:r>
                     </a:p>
                   </a:txBody>
@@ -3431,7 +3431,7 @@
                         <a:rPr sz="900">
                           <a:latin typeface="Segoe UI"/>
                         </a:rPr>
-                        <a:t>$7,560,611.56  (18.4% achieved)</a:t>
+                        <a:t>$7,560,611.56  (18.8% achieved)</a:t>
                       </a:r>
                     </a:p>
                   </a:txBody>
@@ -3653,7 +3653,7 @@
                         <a:rPr sz="900">
                           <a:latin typeface="Segoe UI"/>
                         </a:rPr>
-                        <a:t>Fleet Subs: 94  |  Binds: 9</a:t>
+                        <a:t>Fleet Subs: 95  |  Binds: 10</a:t>
                       </a:r>
                     </a:p>
                   </a:txBody>
@@ -3690,7 +3690,7 @@
                         <a:rPr sz="900">
                           <a:latin typeface="Segoe UI"/>
                         </a:rPr>
-                        <a:t>Fleet Bound Premium: $714,504.37</a:t>
+                        <a:t>Fleet Bound Premium: $751,536.13</a:t>
                       </a:r>
                     </a:p>
                   </a:txBody>
@@ -3727,7 +3727,7 @@
                         <a:rPr sz="900">
                           <a:latin typeface="Segoe UI"/>
                         </a:rPr>
-                        <a:t>Fleet Book %: 51.5%</a:t>
+                        <a:t>Fleet Book %: 52.9%</a:t>
                       </a:r>
                     </a:p>
                   </a:txBody>
@@ -3766,7 +3766,7 @@
                         <a:rPr sz="900">
                           <a:latin typeface="Segoe UI"/>
                         </a:rPr>
-                        <a:t>Non-Fleet Subs: 1340  |  Binds: 39</a:t>
+                        <a:t>Non-Fleet Subs: 1350  |  Binds: 39</a:t>
                       </a:r>
                     </a:p>
                   </a:txBody>
@@ -3803,7 +3803,7 @@
                         <a:rPr sz="900">
                           <a:latin typeface="Segoe UI"/>
                         </a:rPr>
-                        <a:t>Non-Fleet Bound Premium: $673,151.38</a:t>
+                        <a:t>Non-Fleet Bound Premium: $667,953.04</a:t>
                       </a:r>
                     </a:p>
                   </a:txBody>
@@ -3840,7 +3840,7 @@
                         <a:rPr sz="900">
                           <a:latin typeface="Segoe UI"/>
                         </a:rPr>
-                        <a:t>Non-Fleet Book %: 48.5%</a:t>
+                        <a:t>Non-Fleet Book %: 47.1%</a:t>
                       </a:r>
                     </a:p>
                   </a:txBody>
@@ -4351,7 +4351,7 @@
                           </a:solidFill>
                           <a:latin typeface="Segoe UI"/>
                         </a:rPr>
-                        <a:t>369</a:t>
+                        <a:t>370</a:t>
                       </a:r>
                     </a:p>
                   </a:txBody>
@@ -4428,7 +4428,7 @@
                           </a:solidFill>
                           <a:latin typeface="Segoe UI"/>
                         </a:rPr>
-                        <a:t>227</a:t>
+                        <a:t>238</a:t>
                       </a:r>
                     </a:p>
                   </a:txBody>
@@ -4624,7 +4624,7 @@
                           </a:solidFill>
                           <a:latin typeface="Segoe UI"/>
                         </a:rPr>
-                        <a:t>6.0%</a:t>
+                        <a:t>5.9%</a:t>
                       </a:r>
                     </a:p>
                   </a:txBody>
@@ -4664,7 +4664,7 @@
                         <a:rPr sz="800">
                           <a:latin typeface="Segoe UI"/>
                         </a:rPr>
-                        <a:t>14.6%</a:t>
+                        <a:t>15.1%</a:t>
                       </a:r>
                     </a:p>
                   </a:txBody>
@@ -4707,7 +4707,7 @@
                           </a:solidFill>
                           <a:latin typeface="Segoe UI"/>
                         </a:rPr>
-                        <a:t>5.3%</a:t>
+                        <a:t>5.0%</a:t>
                       </a:r>
                     </a:p>
                   </a:txBody>
@@ -4747,7 +4747,7 @@
                         <a:rPr sz="800">
                           <a:latin typeface="Segoe UI"/>
                         </a:rPr>
-                        <a:t>8.8%</a:t>
+                        <a:t>9.5%</a:t>
                       </a:r>
                     </a:p>
                   </a:txBody>
@@ -4943,7 +4943,7 @@
                         <a:rPr sz="800">
                           <a:latin typeface="Segoe UI"/>
                         </a:rPr>
-                        <a:t>30</a:t>
+                        <a:t>31</a:t>
                       </a:r>
                     </a:p>
                   </a:txBody>
@@ -5020,7 +5020,7 @@
                         <a:rPr sz="800">
                           <a:latin typeface="Segoe UI"/>
                         </a:rPr>
-                        <a:t>26</a:t>
+                        <a:t>28</a:t>
                       </a:r>
                     </a:p>
                   </a:txBody>
@@ -5262,7 +5262,7 @@
                           </a:solidFill>
                           <a:latin typeface="Segoe UI"/>
                         </a:rPr>
-                        <a:t>$166.9K</a:t>
+                        <a:t>$198.7K</a:t>
                       </a:r>
                     </a:p>
                   </a:txBody>

--- a/generated/Tier 1 Broker Scorecards/Prestige International Insurance Group Inc Dba Prestige Trucking Insurance Inc_Broker_Scorecard.pptx
+++ b/generated/Tier 1 Broker Scorecards/Prestige International Insurance Group Inc Dba Prestige Trucking Insurance Inc_Broker_Scorecard.pptx
@@ -3394,7 +3394,7 @@
                         <a:rPr sz="900">
                           <a:latin typeface="Segoe UI"/>
                         </a:rPr>
-                        <a:t>Tier 1  |  3.39% / 15.00%</a:t>
+                        <a:t>Tier 1  |  3.35% / 15.00%</a:t>
                       </a:r>
                     </a:p>
                   </a:txBody>
@@ -3653,7 +3653,7 @@
                         <a:rPr sz="900">
                           <a:latin typeface="Segoe UI"/>
                         </a:rPr>
-                        <a:t>Fleet Subs: 95  |  Binds: 10</a:t>
+                        <a:t>Fleet Subs: 96  |  Binds: 10</a:t>
                       </a:r>
                     </a:p>
                   </a:txBody>
@@ -3690,7 +3690,7 @@
                         <a:rPr sz="900">
                           <a:latin typeface="Segoe UI"/>
                         </a:rPr>
-                        <a:t>Fleet Bound Premium: $751,536.13</a:t>
+                        <a:t>Fleet Bound Premium: $755,703.43</a:t>
                       </a:r>
                     </a:p>
                   </a:txBody>
@@ -3727,7 +3727,7 @@
                         <a:rPr sz="900">
                           <a:latin typeface="Segoe UI"/>
                         </a:rPr>
-                        <a:t>Fleet Book %: 52.9%</a:t>
+                        <a:t>Fleet Book %: 53.2%</a:t>
                       </a:r>
                     </a:p>
                   </a:txBody>
@@ -3766,7 +3766,7 @@
                         <a:rPr sz="900">
                           <a:latin typeface="Segoe UI"/>
                         </a:rPr>
-                        <a:t>Non-Fleet Subs: 1350  |  Binds: 39</a:t>
+                        <a:t>Non-Fleet Subs: 1365  |  Binds: 39</a:t>
                       </a:r>
                     </a:p>
                   </a:txBody>
@@ -3803,7 +3803,7 @@
                         <a:rPr sz="900">
                           <a:latin typeface="Segoe UI"/>
                         </a:rPr>
-                        <a:t>Non-Fleet Bound Premium: $667,953.04</a:t>
+                        <a:t>Non-Fleet Bound Premium: $663,785.74</a:t>
                       </a:r>
                     </a:p>
                   </a:txBody>
@@ -3840,7 +3840,7 @@
                         <a:rPr sz="900">
                           <a:latin typeface="Segoe UI"/>
                         </a:rPr>
-                        <a:t>Non-Fleet Book %: 47.1%</a:t>
+                        <a:t>Non-Fleet Book %: 46.8%</a:t>
                       </a:r>
                     </a:p>
                   </a:txBody>
@@ -4428,7 +4428,7 @@
                           </a:solidFill>
                           <a:latin typeface="Segoe UI"/>
                         </a:rPr>
-                        <a:t>238</a:t>
+                        <a:t>254</a:t>
                       </a:r>
                     </a:p>
                   </a:txBody>
@@ -4581,7 +4581,7 @@
                         <a:rPr sz="800">
                           <a:latin typeface="Segoe UI"/>
                         </a:rPr>
-                        <a:t>15.5%</a:t>
+                        <a:t>15.0%</a:t>
                       </a:r>
                     </a:p>
                   </a:txBody>
@@ -4664,7 +4664,7 @@
                         <a:rPr sz="800">
                           <a:latin typeface="Segoe UI"/>
                         </a:rPr>
-                        <a:t>15.1%</a:t>
+                        <a:t>14.6%</a:t>
                       </a:r>
                     </a:p>
                   </a:txBody>
@@ -4707,7 +4707,7 @@
                           </a:solidFill>
                           <a:latin typeface="Segoe UI"/>
                         </a:rPr>
-                        <a:t>5.0%</a:t>
+                        <a:t>4.7%</a:t>
                       </a:r>
                     </a:p>
                   </a:txBody>
@@ -4866,7 +4866,7 @@
                         <a:rPr sz="800">
                           <a:latin typeface="Segoe UI"/>
                         </a:rPr>
-                        <a:t>32</a:t>
+                        <a:t>31</a:t>
                       </a:r>
                     </a:p>
                   </a:txBody>
@@ -4943,7 +4943,7 @@
                         <a:rPr sz="800">
                           <a:latin typeface="Segoe UI"/>
                         </a:rPr>
-                        <a:t>31</a:t>
+                        <a:t>30</a:t>
                       </a:r>
                     </a:p>
                   </a:txBody>

--- a/generated/Tier 1 Broker Scorecards/Prestige International Insurance Group Inc Dba Prestige Trucking Insurance Inc_Broker_Scorecard.pptx
+++ b/generated/Tier 1 Broker Scorecards/Prestige International Insurance Group Inc Dba Prestige Trucking Insurance Inc_Broker_Scorecard.pptx
@@ -3357,7 +3357,7 @@
                         <a:rPr sz="800">
                           <a:latin typeface="Segoe UI"/>
                         </a:rPr>
-                        <a:t>$5,400,436.83 / $4,985,091.08 / $1,419,489.17</a:t>
+                        <a:t>$5,400,436.83 / $4,981,889.06 / $1,416,287.15</a:t>
                       </a:r>
                     </a:p>
                   </a:txBody>
@@ -3394,7 +3394,7 @@
                         <a:rPr sz="900">
                           <a:latin typeface="Segoe UI"/>
                         </a:rPr>
-                        <a:t>Tier 1  |  3.35% / 15.00%</a:t>
+                        <a:t>Tier 1  |  3.25% / 15.00%</a:t>
                       </a:r>
                     </a:p>
                   </a:txBody>
@@ -3431,7 +3431,7 @@
                         <a:rPr sz="900">
                           <a:latin typeface="Segoe UI"/>
                         </a:rPr>
-                        <a:t>$7,560,611.56  (18.8% achieved)</a:t>
+                        <a:t>$7,560,611.56  (18.7% achieved)</a:t>
                       </a:r>
                     </a:p>
                   </a:txBody>
@@ -3653,7 +3653,7 @@
                         <a:rPr sz="900">
                           <a:latin typeface="Segoe UI"/>
                         </a:rPr>
-                        <a:t>Fleet Subs: 96  |  Binds: 10</a:t>
+                        <a:t>Fleet Subs: 99  |  Binds: 10</a:t>
                       </a:r>
                     </a:p>
                   </a:txBody>
@@ -3690,7 +3690,7 @@
                         <a:rPr sz="900">
                           <a:latin typeface="Segoe UI"/>
                         </a:rPr>
-                        <a:t>Fleet Bound Premium: $755,703.43</a:t>
+                        <a:t>Fleet Bound Premium: $766,742.17</a:t>
                       </a:r>
                     </a:p>
                   </a:txBody>
@@ -3727,7 +3727,7 @@
                         <a:rPr sz="900">
                           <a:latin typeface="Segoe UI"/>
                         </a:rPr>
-                        <a:t>Fleet Book %: 53.2%</a:t>
+                        <a:t>Fleet Book %: 54.1%</a:t>
                       </a:r>
                     </a:p>
                   </a:txBody>
@@ -3766,7 +3766,7 @@
                         <a:rPr sz="900">
                           <a:latin typeface="Segoe UI"/>
                         </a:rPr>
-                        <a:t>Non-Fleet Subs: 1365  |  Binds: 39</a:t>
+                        <a:t>Non-Fleet Subs: 1378  |  Binds: 38</a:t>
                       </a:r>
                     </a:p>
                   </a:txBody>
@@ -3803,7 +3803,7 @@
                         <a:rPr sz="900">
                           <a:latin typeface="Segoe UI"/>
                         </a:rPr>
-                        <a:t>Non-Fleet Bound Premium: $663,785.74</a:t>
+                        <a:t>Non-Fleet Bound Premium: $649,544.98</a:t>
                       </a:r>
                     </a:p>
                   </a:txBody>
@@ -3840,7 +3840,7 @@
                         <a:rPr sz="900">
                           <a:latin typeface="Segoe UI"/>
                         </a:rPr>
-                        <a:t>Non-Fleet Book %: 46.8%</a:t>
+                        <a:t>Non-Fleet Book %: 45.9%</a:t>
                       </a:r>
                     </a:p>
                   </a:txBody>
@@ -4428,7 +4428,7 @@
                           </a:solidFill>
                           <a:latin typeface="Segoe UI"/>
                         </a:rPr>
-                        <a:t>254</a:t>
+                        <a:t>270</a:t>
                       </a:r>
                     </a:p>
                   </a:txBody>
@@ -4581,7 +4581,7 @@
                         <a:rPr sz="800">
                           <a:latin typeface="Segoe UI"/>
                         </a:rPr>
-                        <a:t>15.0%</a:t>
+                        <a:t>15.5%</a:t>
                       </a:r>
                     </a:p>
                   </a:txBody>
@@ -4707,7 +4707,7 @@
                           </a:solidFill>
                           <a:latin typeface="Segoe UI"/>
                         </a:rPr>
-                        <a:t>4.7%</a:t>
+                        <a:t>4.4%</a:t>
                       </a:r>
                     </a:p>
                   </a:txBody>
@@ -4866,7 +4866,7 @@
                         <a:rPr sz="800">
                           <a:latin typeface="Segoe UI"/>
                         </a:rPr>
-                        <a:t>31</a:t>
+                        <a:t>32</a:t>
                       </a:r>
                     </a:p>
                   </a:txBody>
@@ -5262,7 +5262,7 @@
                           </a:solidFill>
                           <a:latin typeface="Segoe UI"/>
                         </a:rPr>
-                        <a:t>$198.7K</a:t>
+                        <a:t>$195.5K</a:t>
                       </a:r>
                     </a:p>
                   </a:txBody>

--- a/generated/Tier 1 Broker Scorecards/Prestige International Insurance Group Inc Dba Prestige Trucking Insurance Inc_Broker_Scorecard.pptx
+++ b/generated/Tier 1 Broker Scorecards/Prestige International Insurance Group Inc Dba Prestige Trucking Insurance Inc_Broker_Scorecard.pptx
@@ -3357,7 +3357,7 @@
                         <a:rPr sz="800">
                           <a:latin typeface="Segoe UI"/>
                         </a:rPr>
-                        <a:t>$5,400,436.83 / $4,981,889.06 / $1,416,287.15</a:t>
+                        <a:t>$5,400,436.83 / $4,982,713.81 / $1,417,111.90</a:t>
                       </a:r>
                     </a:p>
                   </a:txBody>
@@ -3394,7 +3394,7 @@
                         <a:rPr sz="900">
                           <a:latin typeface="Segoe UI"/>
                         </a:rPr>
-                        <a:t>Tier 1  |  3.25% / 15.00%</a:t>
+                        <a:t>Tier 1  |  3.43% / 15.00%</a:t>
                       </a:r>
                     </a:p>
                   </a:txBody>
@@ -3653,7 +3653,7 @@
                         <a:rPr sz="900">
                           <a:latin typeface="Segoe UI"/>
                         </a:rPr>
-                        <a:t>Fleet Subs: 99  |  Binds: 10</a:t>
+                        <a:t>Fleet Subs: 100  |  Binds: 11</a:t>
                       </a:r>
                     </a:p>
                   </a:txBody>
@@ -3690,7 +3690,7 @@
                         <a:rPr sz="900">
                           <a:latin typeface="Segoe UI"/>
                         </a:rPr>
-                        <a:t>Fleet Bound Premium: $766,742.17</a:t>
+                        <a:t>Fleet Bound Premium: $822,349.89</a:t>
                       </a:r>
                     </a:p>
                   </a:txBody>
@@ -3727,7 +3727,7 @@
                         <a:rPr sz="900">
                           <a:latin typeface="Segoe UI"/>
                         </a:rPr>
-                        <a:t>Fleet Book %: 54.1%</a:t>
+                        <a:t>Fleet Book %: 58.0%</a:t>
                       </a:r>
                     </a:p>
                   </a:txBody>
@@ -3766,7 +3766,7 @@
                         <a:rPr sz="900">
                           <a:latin typeface="Segoe UI"/>
                         </a:rPr>
-                        <a:t>Non-Fleet Subs: 1378  |  Binds: 38</a:t>
+                        <a:t>Non-Fleet Subs: 1386  |  Binds: 40</a:t>
                       </a:r>
                     </a:p>
                   </a:txBody>
@@ -3803,7 +3803,7 @@
                         <a:rPr sz="900">
                           <a:latin typeface="Segoe UI"/>
                         </a:rPr>
-                        <a:t>Non-Fleet Bound Premium: $649,544.98</a:t>
+                        <a:t>Non-Fleet Bound Premium: $594,762.01</a:t>
                       </a:r>
                     </a:p>
                   </a:txBody>
@@ -3840,7 +3840,7 @@
                         <a:rPr sz="900">
                           <a:latin typeface="Segoe UI"/>
                         </a:rPr>
-                        <a:t>Non-Fleet Book %: 45.9%</a:t>
+                        <a:t>Non-Fleet Book %: 42.0%</a:t>
                       </a:r>
                     </a:p>
                   </a:txBody>
@@ -4428,7 +4428,7 @@
                           </a:solidFill>
                           <a:latin typeface="Segoe UI"/>
                         </a:rPr>
-                        <a:t>270</a:t>
+                        <a:t>279</a:t>
                       </a:r>
                     </a:p>
                   </a:txBody>
@@ -4581,7 +4581,7 @@
                         <a:rPr sz="800">
                           <a:latin typeface="Segoe UI"/>
                         </a:rPr>
-                        <a:t>15.5%</a:t>
+                        <a:t>15.0%</a:t>
                       </a:r>
                     </a:p>
                   </a:txBody>
@@ -4664,7 +4664,7 @@
                         <a:rPr sz="800">
                           <a:latin typeface="Segoe UI"/>
                         </a:rPr>
-                        <a:t>14.6%</a:t>
+                        <a:t>15.1%</a:t>
                       </a:r>
                     </a:p>
                   </a:txBody>
@@ -4707,7 +4707,7 @@
                           </a:solidFill>
                           <a:latin typeface="Segoe UI"/>
                         </a:rPr>
-                        <a:t>4.4%</a:t>
+                        <a:t>5.0%</a:t>
                       </a:r>
                     </a:p>
                   </a:txBody>
@@ -4866,7 +4866,7 @@
                         <a:rPr sz="800">
                           <a:latin typeface="Segoe UI"/>
                         </a:rPr>
-                        <a:t>32</a:t>
+                        <a:t>31</a:t>
                       </a:r>
                     </a:p>
                   </a:txBody>
@@ -4943,7 +4943,7 @@
                         <a:rPr sz="800">
                           <a:latin typeface="Segoe UI"/>
                         </a:rPr>
-                        <a:t>30</a:t>
+                        <a:t>31</a:t>
                       </a:r>
                     </a:p>
                   </a:txBody>
@@ -4983,7 +4983,7 @@
                           </a:solidFill>
                           <a:latin typeface="Segoe UI"/>
                         </a:rPr>
-                        <a:t>12</a:t>
+                        <a:t>14</a:t>
                       </a:r>
                     </a:p>
                   </a:txBody>
@@ -5262,7 +5262,7 @@
                           </a:solidFill>
                           <a:latin typeface="Segoe UI"/>
                         </a:rPr>
-                        <a:t>$195.5K</a:t>
+                        <a:t>$196.3K</a:t>
                       </a:r>
                     </a:p>
                   </a:txBody>

--- a/generated/Tier 1 Broker Scorecards/Prestige International Insurance Group Inc Dba Prestige Trucking Insurance Inc_Broker_Scorecard.pptx
+++ b/generated/Tier 1 Broker Scorecards/Prestige International Insurance Group Inc Dba Prestige Trucking Insurance Inc_Broker_Scorecard.pptx
@@ -3690,7 +3690,7 @@
                         <a:rPr sz="900">
                           <a:latin typeface="Segoe UI"/>
                         </a:rPr>
-                        <a:t>Fleet Bound Premium: $822,349.89</a:t>
+                        <a:t>Fleet Bound Premium: $819,023.87</a:t>
                       </a:r>
                     </a:p>
                   </a:txBody>
@@ -3727,7 +3727,7 @@
                         <a:rPr sz="900">
                           <a:latin typeface="Segoe UI"/>
                         </a:rPr>
-                        <a:t>Fleet Book %: 58.0%</a:t>
+                        <a:t>Fleet Book %: 57.8%</a:t>
                       </a:r>
                     </a:p>
                   </a:txBody>
@@ -3803,7 +3803,7 @@
                         <a:rPr sz="900">
                           <a:latin typeface="Segoe UI"/>
                         </a:rPr>
-                        <a:t>Non-Fleet Bound Premium: $594,762.01</a:t>
+                        <a:t>Non-Fleet Bound Premium: $598,088.03</a:t>
                       </a:r>
                     </a:p>
                   </a:txBody>
@@ -3840,7 +3840,7 @@
                         <a:rPr sz="900">
                           <a:latin typeface="Segoe UI"/>
                         </a:rPr>
-                        <a:t>Non-Fleet Book %: 42.0%</a:t>
+                        <a:t>Non-Fleet Book %: 42.2%</a:t>
                       </a:r>
                     </a:p>
                   </a:txBody>
@@ -4747,7 +4747,7 @@
                         <a:rPr sz="800">
                           <a:latin typeface="Segoe UI"/>
                         </a:rPr>
-                        <a:t>9.5%</a:t>
+                        <a:t>9.1%</a:t>
                       </a:r>
                     </a:p>
                   </a:txBody>
@@ -5020,7 +5020,7 @@
                         <a:rPr sz="800">
                           <a:latin typeface="Segoe UI"/>
                         </a:rPr>
-                        <a:t>28</a:t>
+                        <a:t>27</a:t>
                       </a:r>
                     </a:p>
                   </a:txBody>

--- a/generated/Tier 1 Broker Scorecards/Prestige International Insurance Group Inc Dba Prestige Trucking Insurance Inc_Broker_Scorecard.pptx
+++ b/generated/Tier 1 Broker Scorecards/Prestige International Insurance Group Inc Dba Prestige Trucking Insurance Inc_Broker_Scorecard.pptx
@@ -3357,7 +3357,7 @@
                         <a:rPr sz="800">
                           <a:latin typeface="Segoe UI"/>
                         </a:rPr>
-                        <a:t>$5,400,436.83 / $4,982,713.81 / $1,417,111.90</a:t>
+                        <a:t>$5,400,436.83 / $4,622,708.60 / $1,417,111.90</a:t>
                       </a:r>
                     </a:p>
                   </a:txBody>
@@ -4747,7 +4747,7 @@
                         <a:rPr sz="800">
                           <a:latin typeface="Segoe UI"/>
                         </a:rPr>
-                        <a:t>9.1%</a:t>
+                        <a:t>9.5%</a:t>
                       </a:r>
                     </a:p>
                   </a:txBody>
@@ -5020,7 +5020,7 @@
                         <a:rPr sz="800">
                           <a:latin typeface="Segoe UI"/>
                         </a:rPr>
-                        <a:t>27</a:t>
+                        <a:t>28</a:t>
                       </a:r>
                     </a:p>
                   </a:txBody>
